--- a/examples/ppt/transitions/transitions-directional.pptx
+++ b/examples/ppt/transitions/transitions-directional.pptx
@@ -5,31 +5,31 @@
     <p:sldMasterId xmlns:r="http://schemas.openxmlformats.org/officeDocument/2006/relationships" id="2147483648" r:id="rId1"/>
   </p:sldMasterIdLst>
   <p:sldIdLst>
-    <p:sldId id="256" r:id="R4bc8b57eec4f4298"/>
-    <p:sldId id="257" r:id="R9fe9eed938684465"/>
-    <p:sldId id="258" r:id="R65a6a9a9c00947eb"/>
-    <p:sldId id="259" r:id="Rc42e6e4458634335"/>
-    <p:sldId id="260" r:id="Ra706e23173914eff"/>
-    <p:sldId id="261" r:id="Raa1b4b25848340c1"/>
-    <p:sldId id="262" r:id="R6c1d006eea384c2e"/>
-    <p:sldId id="263" r:id="R76a5e3f85db04195"/>
-    <p:sldId id="264" r:id="R90b0bee6d2864939"/>
-    <p:sldId id="265" r:id="Raf32d311a9334271"/>
-    <p:sldId id="266" r:id="Rd608f140686d4be8"/>
-    <p:sldId id="267" r:id="R4dfae19465ac4eab"/>
-    <p:sldId id="268" r:id="R88024dedd2d74866"/>
-    <p:sldId id="269" r:id="Rbec703bea63641e1"/>
-    <p:sldId id="270" r:id="R5e0ca73de68c4169"/>
-    <p:sldId id="271" r:id="R052c82d687104f40"/>
-    <p:sldId id="272" r:id="R1964a319bf3c47c8"/>
-    <p:sldId id="273" r:id="Rb1f6cdaa7d824788"/>
-    <p:sldId id="274" r:id="Rb2659af8f6ab49b5"/>
-    <p:sldId id="275" r:id="Rfe6234aa77a74a92"/>
-    <p:sldId id="276" r:id="Rf8c18f0239884ee3"/>
-    <p:sldId id="277" r:id="Rd365aa6aec584f9a"/>
-    <p:sldId id="278" r:id="Re9e036301e774624"/>
-    <p:sldId id="279" r:id="R7aa2be63946e4cdf"/>
-    <p:sldId id="280" r:id="Rbf476e9b45f440c4"/>
+    <p:sldId id="256" r:id="Rccbde8722918431d"/>
+    <p:sldId id="257" r:id="Rc6cb7cd3b0714488"/>
+    <p:sldId id="258" r:id="R38442c4aae3a4d3d"/>
+    <p:sldId id="259" r:id="R276deb3dab9e4899"/>
+    <p:sldId id="260" r:id="R15e5a24deab74475"/>
+    <p:sldId id="261" r:id="Rc036d4b5b78d4e21"/>
+    <p:sldId id="262" r:id="R3d9f3cb788264641"/>
+    <p:sldId id="263" r:id="Rf73b811978e644a5"/>
+    <p:sldId id="264" r:id="R0234e0e5b6bd4826"/>
+    <p:sldId id="265" r:id="R64284f07df764476"/>
+    <p:sldId id="266" r:id="Re4eb3bf3fb5e4316"/>
+    <p:sldId id="267" r:id="Re788869f45e846a6"/>
+    <p:sldId id="268" r:id="R821ac3656d604d58"/>
+    <p:sldId id="269" r:id="R2ac1d437476b49f6"/>
+    <p:sldId id="270" r:id="Ra32f65d3e8714a80"/>
+    <p:sldId id="271" r:id="R82b07c621dab4b3b"/>
+    <p:sldId id="272" r:id="Ra215f72cd92a4ab7"/>
+    <p:sldId id="273" r:id="R673c9e13d4b64f84"/>
+    <p:sldId id="274" r:id="R5a8d522cbbfe4204"/>
+    <p:sldId id="275" r:id="R360fd34cc42a4067"/>
+    <p:sldId id="276" r:id="R979a81c033b041b4"/>
+    <p:sldId id="277" r:id="Ra716a81c581d4908"/>
+    <p:sldId id="278" r:id="R33be9f9145b64be1"/>
+    <p:sldId id="279" r:id="R88ed13f602684cde"/>
+    <p:sldId id="280" r:id="R1e20686700b944de"/>
   </p:sldIdLst>
   <p:sldSz cx="12192000" cy="6858000"/>
   <p:notesSz cx="6858000" cy="9144000"/>
@@ -304,7 +304,7 @@
 </file>
 
 <file path=ppt/slideMasters/slideMaster1.xml><?xml version="1.0" encoding="utf-8"?>
-<p:sldMaster xmlns:p="http://schemas.openxmlformats.org/presentationml/2006/main">
+<p:sldMaster xmlns:r="http://schemas.openxmlformats.org/officeDocument/2006/relationships" xmlns:p="http://schemas.openxmlformats.org/presentationml/2006/main">
   <p:cSld>
     <p:spTree>
       <p:nvGrpSpPr>
@@ -338,7 +338,7 @@
       <p:grpSpPr/>
       <p:sp>
         <p:nvSpPr>
-          <p:cNvPr id="10000" name="TextBox 1"/>
+          <p:cNvPr id="100000" name="TextBox 1"/>
           <p:cNvSpPr/>
           <p:nvPr/>
         </p:nvSpPr>
@@ -357,17 +357,12 @@
         <p:txBody>
           <a:bodyPr xmlns:a="http://schemas.openxmlformats.org/drawingml/2006/main"/>
           <a:lstStyle xmlns:a="http://schemas.openxmlformats.org/drawingml/2006/main"/>
-          <a:p xmlns:a="http://schemas.openxmlformats.org/drawingml/2006/main">
-            <a:r>
-              <a:rPr lang="en-US"/>
-              <a:t/>
-            </a:r>
-          </a:p>
-        </p:txBody>
-      </p:sp>
-      <p:sp>
-        <p:nvSpPr>
-          <p:cNvPr id="10001" name="TextBox 2"/>
+          <a:p xmlns:a="http://schemas.openxmlformats.org/drawingml/2006/main"/>
+        </p:txBody>
+      </p:sp>
+      <p:sp>
+        <p:nvSpPr>
+          <p:cNvPr id="100001" name="TextBox 2"/>
           <p:cNvSpPr txBox="1"/>
           <p:nvPr/>
         </p:nvSpPr>
@@ -413,7 +408,7 @@
       <p:grpSpPr/>
       <p:sp>
         <p:nvSpPr>
-          <p:cNvPr id="10018" name="TextBox 1"/>
+          <p:cNvPr id="100018" name="TextBox 1"/>
           <p:cNvSpPr/>
           <p:nvPr/>
         </p:nvSpPr>
@@ -432,17 +427,12 @@
         <p:txBody>
           <a:bodyPr xmlns:a="http://schemas.openxmlformats.org/drawingml/2006/main"/>
           <a:lstStyle xmlns:a="http://schemas.openxmlformats.org/drawingml/2006/main"/>
-          <a:p xmlns:a="http://schemas.openxmlformats.org/drawingml/2006/main">
-            <a:r>
-              <a:rPr lang="en-US"/>
-              <a:t/>
-            </a:r>
-          </a:p>
-        </p:txBody>
-      </p:sp>
-      <p:sp>
-        <p:nvSpPr>
-          <p:cNvPr id="10019" name="TextBox 2"/>
+          <a:p xmlns:a="http://schemas.openxmlformats.org/drawingml/2006/main"/>
+        </p:txBody>
+      </p:sp>
+      <p:sp>
+        <p:nvSpPr>
+          <p:cNvPr id="100019" name="TextBox 2"/>
           <p:cNvSpPr txBox="1"/>
           <p:nvPr/>
         </p:nvSpPr>
@@ -491,7 +481,7 @@
       <p:grpSpPr/>
       <p:sp>
         <p:nvSpPr>
-          <p:cNvPr id="10020" name="TextBox 1"/>
+          <p:cNvPr id="100020" name="TextBox 1"/>
           <p:cNvSpPr/>
           <p:nvPr/>
         </p:nvSpPr>
@@ -510,17 +500,12 @@
         <p:txBody>
           <a:bodyPr xmlns:a="http://schemas.openxmlformats.org/drawingml/2006/main"/>
           <a:lstStyle xmlns:a="http://schemas.openxmlformats.org/drawingml/2006/main"/>
-          <a:p xmlns:a="http://schemas.openxmlformats.org/drawingml/2006/main">
-            <a:r>
-              <a:rPr lang="en-US"/>
-              <a:t/>
-            </a:r>
-          </a:p>
-        </p:txBody>
-      </p:sp>
-      <p:sp>
-        <p:nvSpPr>
-          <p:cNvPr id="10021" name="TextBox 2"/>
+          <a:p xmlns:a="http://schemas.openxmlformats.org/drawingml/2006/main"/>
+        </p:txBody>
+      </p:sp>
+      <p:sp>
+        <p:nvSpPr>
+          <p:cNvPr id="100021" name="TextBox 2"/>
           <p:cNvSpPr txBox="1"/>
           <p:nvPr/>
         </p:nvSpPr>
@@ -569,7 +554,7 @@
       <p:grpSpPr/>
       <p:sp>
         <p:nvSpPr>
-          <p:cNvPr id="10022" name="TextBox 1"/>
+          <p:cNvPr id="100022" name="TextBox 1"/>
           <p:cNvSpPr/>
           <p:nvPr/>
         </p:nvSpPr>
@@ -588,17 +573,12 @@
         <p:txBody>
           <a:bodyPr xmlns:a="http://schemas.openxmlformats.org/drawingml/2006/main"/>
           <a:lstStyle xmlns:a="http://schemas.openxmlformats.org/drawingml/2006/main"/>
-          <a:p xmlns:a="http://schemas.openxmlformats.org/drawingml/2006/main">
-            <a:r>
-              <a:rPr lang="en-US"/>
-              <a:t/>
-            </a:r>
-          </a:p>
-        </p:txBody>
-      </p:sp>
-      <p:sp>
-        <p:nvSpPr>
-          <p:cNvPr id="10023" name="TextBox 2"/>
+          <a:p xmlns:a="http://schemas.openxmlformats.org/drawingml/2006/main"/>
+        </p:txBody>
+      </p:sp>
+      <p:sp>
+        <p:nvSpPr>
+          <p:cNvPr id="100023" name="TextBox 2"/>
           <p:cNvSpPr txBox="1"/>
           <p:nvPr/>
         </p:nvSpPr>
@@ -647,7 +627,7 @@
       <p:grpSpPr/>
       <p:sp>
         <p:nvSpPr>
-          <p:cNvPr id="10024" name="TextBox 1"/>
+          <p:cNvPr id="100024" name="TextBox 1"/>
           <p:cNvSpPr/>
           <p:nvPr/>
         </p:nvSpPr>
@@ -666,17 +646,12 @@
         <p:txBody>
           <a:bodyPr xmlns:a="http://schemas.openxmlformats.org/drawingml/2006/main"/>
           <a:lstStyle xmlns:a="http://schemas.openxmlformats.org/drawingml/2006/main"/>
-          <a:p xmlns:a="http://schemas.openxmlformats.org/drawingml/2006/main">
-            <a:r>
-              <a:rPr lang="en-US"/>
-              <a:t/>
-            </a:r>
-          </a:p>
-        </p:txBody>
-      </p:sp>
-      <p:sp>
-        <p:nvSpPr>
-          <p:cNvPr id="10025" name="TextBox 2"/>
+          <a:p xmlns:a="http://schemas.openxmlformats.org/drawingml/2006/main"/>
+        </p:txBody>
+      </p:sp>
+      <p:sp>
+        <p:nvSpPr>
+          <p:cNvPr id="100025" name="TextBox 2"/>
           <p:cNvSpPr txBox="1"/>
           <p:nvPr/>
         </p:nvSpPr>
@@ -725,7 +700,7 @@
       <p:grpSpPr/>
       <p:sp>
         <p:nvSpPr>
-          <p:cNvPr id="10026" name="TextBox 1"/>
+          <p:cNvPr id="100026" name="TextBox 1"/>
           <p:cNvSpPr/>
           <p:nvPr/>
         </p:nvSpPr>
@@ -744,17 +719,12 @@
         <p:txBody>
           <a:bodyPr xmlns:a="http://schemas.openxmlformats.org/drawingml/2006/main"/>
           <a:lstStyle xmlns:a="http://schemas.openxmlformats.org/drawingml/2006/main"/>
-          <a:p xmlns:a="http://schemas.openxmlformats.org/drawingml/2006/main">
-            <a:r>
-              <a:rPr lang="en-US"/>
-              <a:t/>
-            </a:r>
-          </a:p>
-        </p:txBody>
-      </p:sp>
-      <p:sp>
-        <p:nvSpPr>
-          <p:cNvPr id="10027" name="TextBox 2"/>
+          <a:p xmlns:a="http://schemas.openxmlformats.org/drawingml/2006/main"/>
+        </p:txBody>
+      </p:sp>
+      <p:sp>
+        <p:nvSpPr>
+          <p:cNvPr id="100027" name="TextBox 2"/>
           <p:cNvSpPr txBox="1"/>
           <p:nvPr/>
         </p:nvSpPr>
@@ -803,7 +773,7 @@
       <p:grpSpPr/>
       <p:sp>
         <p:nvSpPr>
-          <p:cNvPr id="10028" name="TextBox 1"/>
+          <p:cNvPr id="100028" name="TextBox 1"/>
           <p:cNvSpPr/>
           <p:nvPr/>
         </p:nvSpPr>
@@ -822,17 +792,12 @@
         <p:txBody>
           <a:bodyPr xmlns:a="http://schemas.openxmlformats.org/drawingml/2006/main"/>
           <a:lstStyle xmlns:a="http://schemas.openxmlformats.org/drawingml/2006/main"/>
-          <a:p xmlns:a="http://schemas.openxmlformats.org/drawingml/2006/main">
-            <a:r>
-              <a:rPr lang="en-US"/>
-              <a:t/>
-            </a:r>
-          </a:p>
-        </p:txBody>
-      </p:sp>
-      <p:sp>
-        <p:nvSpPr>
-          <p:cNvPr id="10029" name="TextBox 2"/>
+          <a:p xmlns:a="http://schemas.openxmlformats.org/drawingml/2006/main"/>
+        </p:txBody>
+      </p:sp>
+      <p:sp>
+        <p:nvSpPr>
+          <p:cNvPr id="100029" name="TextBox 2"/>
           <p:cNvSpPr txBox="1"/>
           <p:nvPr/>
         </p:nvSpPr>
@@ -881,7 +846,7 @@
       <p:grpSpPr/>
       <p:sp>
         <p:nvSpPr>
-          <p:cNvPr id="10030" name="TextBox 1"/>
+          <p:cNvPr id="100030" name="TextBox 1"/>
           <p:cNvSpPr/>
           <p:nvPr/>
         </p:nvSpPr>
@@ -900,17 +865,12 @@
         <p:txBody>
           <a:bodyPr xmlns:a="http://schemas.openxmlformats.org/drawingml/2006/main"/>
           <a:lstStyle xmlns:a="http://schemas.openxmlformats.org/drawingml/2006/main"/>
-          <a:p xmlns:a="http://schemas.openxmlformats.org/drawingml/2006/main">
-            <a:r>
-              <a:rPr lang="en-US"/>
-              <a:t/>
-            </a:r>
-          </a:p>
-        </p:txBody>
-      </p:sp>
-      <p:sp>
-        <p:nvSpPr>
-          <p:cNvPr id="10031" name="TextBox 2"/>
+          <a:p xmlns:a="http://schemas.openxmlformats.org/drawingml/2006/main"/>
+        </p:txBody>
+      </p:sp>
+      <p:sp>
+        <p:nvSpPr>
+          <p:cNvPr id="100031" name="TextBox 2"/>
           <p:cNvSpPr txBox="1"/>
           <p:nvPr/>
         </p:nvSpPr>
@@ -959,7 +919,7 @@
       <p:grpSpPr/>
       <p:sp>
         <p:nvSpPr>
-          <p:cNvPr id="10032" name="TextBox 1"/>
+          <p:cNvPr id="100032" name="TextBox 1"/>
           <p:cNvSpPr/>
           <p:nvPr/>
         </p:nvSpPr>
@@ -978,17 +938,12 @@
         <p:txBody>
           <a:bodyPr xmlns:a="http://schemas.openxmlformats.org/drawingml/2006/main"/>
           <a:lstStyle xmlns:a="http://schemas.openxmlformats.org/drawingml/2006/main"/>
-          <a:p xmlns:a="http://schemas.openxmlformats.org/drawingml/2006/main">
-            <a:r>
-              <a:rPr lang="en-US"/>
-              <a:t/>
-            </a:r>
-          </a:p>
-        </p:txBody>
-      </p:sp>
-      <p:sp>
-        <p:nvSpPr>
-          <p:cNvPr id="10033" name="TextBox 2"/>
+          <a:p xmlns:a="http://schemas.openxmlformats.org/drawingml/2006/main"/>
+        </p:txBody>
+      </p:sp>
+      <p:sp>
+        <p:nvSpPr>
+          <p:cNvPr id="100033" name="TextBox 2"/>
           <p:cNvSpPr txBox="1"/>
           <p:nvPr/>
         </p:nvSpPr>
@@ -1037,7 +992,7 @@
       <p:grpSpPr/>
       <p:sp>
         <p:nvSpPr>
-          <p:cNvPr id="10034" name="TextBox 1"/>
+          <p:cNvPr id="100034" name="TextBox 1"/>
           <p:cNvSpPr/>
           <p:nvPr/>
         </p:nvSpPr>
@@ -1056,17 +1011,12 @@
         <p:txBody>
           <a:bodyPr xmlns:a="http://schemas.openxmlformats.org/drawingml/2006/main"/>
           <a:lstStyle xmlns:a="http://schemas.openxmlformats.org/drawingml/2006/main"/>
-          <a:p xmlns:a="http://schemas.openxmlformats.org/drawingml/2006/main">
-            <a:r>
-              <a:rPr lang="en-US"/>
-              <a:t/>
-            </a:r>
-          </a:p>
-        </p:txBody>
-      </p:sp>
-      <p:sp>
-        <p:nvSpPr>
-          <p:cNvPr id="10035" name="TextBox 2"/>
+          <a:p xmlns:a="http://schemas.openxmlformats.org/drawingml/2006/main"/>
+        </p:txBody>
+      </p:sp>
+      <p:sp>
+        <p:nvSpPr>
+          <p:cNvPr id="100035" name="TextBox 2"/>
           <p:cNvSpPr txBox="1"/>
           <p:nvPr/>
         </p:nvSpPr>
@@ -1115,7 +1065,7 @@
       <p:grpSpPr/>
       <p:sp>
         <p:nvSpPr>
-          <p:cNvPr id="10036" name="TextBox 1"/>
+          <p:cNvPr id="100036" name="TextBox 1"/>
           <p:cNvSpPr/>
           <p:nvPr/>
         </p:nvSpPr>
@@ -1134,17 +1084,12 @@
         <p:txBody>
           <a:bodyPr xmlns:a="http://schemas.openxmlformats.org/drawingml/2006/main"/>
           <a:lstStyle xmlns:a="http://schemas.openxmlformats.org/drawingml/2006/main"/>
-          <a:p xmlns:a="http://schemas.openxmlformats.org/drawingml/2006/main">
-            <a:r>
-              <a:rPr lang="en-US"/>
-              <a:t/>
-            </a:r>
-          </a:p>
-        </p:txBody>
-      </p:sp>
-      <p:sp>
-        <p:nvSpPr>
-          <p:cNvPr id="10037" name="TextBox 2"/>
+          <a:p xmlns:a="http://schemas.openxmlformats.org/drawingml/2006/main"/>
+        </p:txBody>
+      </p:sp>
+      <p:sp>
+        <p:nvSpPr>
+          <p:cNvPr id="100037" name="TextBox 2"/>
           <p:cNvSpPr txBox="1"/>
           <p:nvPr/>
         </p:nvSpPr>
@@ -1193,7 +1138,7 @@
       <p:grpSpPr/>
       <p:sp>
         <p:nvSpPr>
-          <p:cNvPr id="10002" name="TextBox 1"/>
+          <p:cNvPr id="100002" name="TextBox 1"/>
           <p:cNvSpPr/>
           <p:nvPr/>
         </p:nvSpPr>
@@ -1212,17 +1157,12 @@
         <p:txBody>
           <a:bodyPr xmlns:a="http://schemas.openxmlformats.org/drawingml/2006/main"/>
           <a:lstStyle xmlns:a="http://schemas.openxmlformats.org/drawingml/2006/main"/>
-          <a:p xmlns:a="http://schemas.openxmlformats.org/drawingml/2006/main">
-            <a:r>
-              <a:rPr lang="en-US"/>
-              <a:t/>
-            </a:r>
-          </a:p>
-        </p:txBody>
-      </p:sp>
-      <p:sp>
-        <p:nvSpPr>
-          <p:cNvPr id="10003" name="TextBox 2"/>
+          <a:p xmlns:a="http://schemas.openxmlformats.org/drawingml/2006/main"/>
+        </p:txBody>
+      </p:sp>
+      <p:sp>
+        <p:nvSpPr>
+          <p:cNvPr id="100003" name="TextBox 2"/>
           <p:cNvSpPr txBox="1"/>
           <p:nvPr/>
         </p:nvSpPr>
@@ -1271,7 +1211,7 @@
       <p:grpSpPr/>
       <p:sp>
         <p:nvSpPr>
-          <p:cNvPr id="10038" name="TextBox 1"/>
+          <p:cNvPr id="100038" name="TextBox 1"/>
           <p:cNvSpPr/>
           <p:nvPr/>
         </p:nvSpPr>
@@ -1290,17 +1230,12 @@
         <p:txBody>
           <a:bodyPr xmlns:a="http://schemas.openxmlformats.org/drawingml/2006/main"/>
           <a:lstStyle xmlns:a="http://schemas.openxmlformats.org/drawingml/2006/main"/>
-          <a:p xmlns:a="http://schemas.openxmlformats.org/drawingml/2006/main">
-            <a:r>
-              <a:rPr lang="en-US"/>
-              <a:t/>
-            </a:r>
-          </a:p>
-        </p:txBody>
-      </p:sp>
-      <p:sp>
-        <p:nvSpPr>
-          <p:cNvPr id="10039" name="TextBox 2"/>
+          <a:p xmlns:a="http://schemas.openxmlformats.org/drawingml/2006/main"/>
+        </p:txBody>
+      </p:sp>
+      <p:sp>
+        <p:nvSpPr>
+          <p:cNvPr id="100039" name="TextBox 2"/>
           <p:cNvSpPr txBox="1"/>
           <p:nvPr/>
         </p:nvSpPr>
@@ -1349,7 +1284,7 @@
       <p:grpSpPr/>
       <p:sp>
         <p:nvSpPr>
-          <p:cNvPr id="10040" name="TextBox 1"/>
+          <p:cNvPr id="100040" name="TextBox 1"/>
           <p:cNvSpPr/>
           <p:nvPr/>
         </p:nvSpPr>
@@ -1368,17 +1303,12 @@
         <p:txBody>
           <a:bodyPr xmlns:a="http://schemas.openxmlformats.org/drawingml/2006/main"/>
           <a:lstStyle xmlns:a="http://schemas.openxmlformats.org/drawingml/2006/main"/>
-          <a:p xmlns:a="http://schemas.openxmlformats.org/drawingml/2006/main">
-            <a:r>
-              <a:rPr lang="en-US"/>
-              <a:t/>
-            </a:r>
-          </a:p>
-        </p:txBody>
-      </p:sp>
-      <p:sp>
-        <p:nvSpPr>
-          <p:cNvPr id="10041" name="TextBox 2"/>
+          <a:p xmlns:a="http://schemas.openxmlformats.org/drawingml/2006/main"/>
+        </p:txBody>
+      </p:sp>
+      <p:sp>
+        <p:nvSpPr>
+          <p:cNvPr id="100041" name="TextBox 2"/>
           <p:cNvSpPr txBox="1"/>
           <p:nvPr/>
         </p:nvSpPr>
@@ -1427,7 +1357,7 @@
       <p:grpSpPr/>
       <p:sp>
         <p:nvSpPr>
-          <p:cNvPr id="10042" name="TextBox 1"/>
+          <p:cNvPr id="100042" name="TextBox 1"/>
           <p:cNvSpPr/>
           <p:nvPr/>
         </p:nvSpPr>
@@ -1446,17 +1376,12 @@
         <p:txBody>
           <a:bodyPr xmlns:a="http://schemas.openxmlformats.org/drawingml/2006/main"/>
           <a:lstStyle xmlns:a="http://schemas.openxmlformats.org/drawingml/2006/main"/>
-          <a:p xmlns:a="http://schemas.openxmlformats.org/drawingml/2006/main">
-            <a:r>
-              <a:rPr lang="en-US"/>
-              <a:t/>
-            </a:r>
-          </a:p>
-        </p:txBody>
-      </p:sp>
-      <p:sp>
-        <p:nvSpPr>
-          <p:cNvPr id="10043" name="TextBox 2"/>
+          <a:p xmlns:a="http://schemas.openxmlformats.org/drawingml/2006/main"/>
+        </p:txBody>
+      </p:sp>
+      <p:sp>
+        <p:nvSpPr>
+          <p:cNvPr id="100043" name="TextBox 2"/>
           <p:cNvSpPr txBox="1"/>
           <p:nvPr/>
         </p:nvSpPr>
@@ -1505,7 +1430,7 @@
       <p:grpSpPr/>
       <p:sp>
         <p:nvSpPr>
-          <p:cNvPr id="10044" name="TextBox 1"/>
+          <p:cNvPr id="100044" name="TextBox 1"/>
           <p:cNvSpPr/>
           <p:nvPr/>
         </p:nvSpPr>
@@ -1524,17 +1449,12 @@
         <p:txBody>
           <a:bodyPr xmlns:a="http://schemas.openxmlformats.org/drawingml/2006/main"/>
           <a:lstStyle xmlns:a="http://schemas.openxmlformats.org/drawingml/2006/main"/>
-          <a:p xmlns:a="http://schemas.openxmlformats.org/drawingml/2006/main">
-            <a:r>
-              <a:rPr lang="en-US"/>
-              <a:t/>
-            </a:r>
-          </a:p>
-        </p:txBody>
-      </p:sp>
-      <p:sp>
-        <p:nvSpPr>
-          <p:cNvPr id="10045" name="TextBox 2"/>
+          <a:p xmlns:a="http://schemas.openxmlformats.org/drawingml/2006/main"/>
+        </p:txBody>
+      </p:sp>
+      <p:sp>
+        <p:nvSpPr>
+          <p:cNvPr id="100045" name="TextBox 2"/>
           <p:cNvSpPr txBox="1"/>
           <p:nvPr/>
         </p:nvSpPr>
@@ -1583,7 +1503,7 @@
       <p:grpSpPr/>
       <p:sp>
         <p:nvSpPr>
-          <p:cNvPr id="10046" name="TextBox 1"/>
+          <p:cNvPr id="100046" name="TextBox 1"/>
           <p:cNvSpPr/>
           <p:nvPr/>
         </p:nvSpPr>
@@ -1602,17 +1522,12 @@
         <p:txBody>
           <a:bodyPr xmlns:a="http://schemas.openxmlformats.org/drawingml/2006/main"/>
           <a:lstStyle xmlns:a="http://schemas.openxmlformats.org/drawingml/2006/main"/>
-          <a:p xmlns:a="http://schemas.openxmlformats.org/drawingml/2006/main">
-            <a:r>
-              <a:rPr lang="en-US"/>
-              <a:t/>
-            </a:r>
-          </a:p>
-        </p:txBody>
-      </p:sp>
-      <p:sp>
-        <p:nvSpPr>
-          <p:cNvPr id="10047" name="TextBox 2"/>
+          <a:p xmlns:a="http://schemas.openxmlformats.org/drawingml/2006/main"/>
+        </p:txBody>
+      </p:sp>
+      <p:sp>
+        <p:nvSpPr>
+          <p:cNvPr id="100047" name="TextBox 2"/>
           <p:cNvSpPr txBox="1"/>
           <p:nvPr/>
         </p:nvSpPr>
@@ -1661,7 +1576,7 @@
       <p:grpSpPr/>
       <p:sp>
         <p:nvSpPr>
-          <p:cNvPr id="10048" name="TextBox 1"/>
+          <p:cNvPr id="100048" name="TextBox 1"/>
           <p:cNvSpPr/>
           <p:nvPr/>
         </p:nvSpPr>
@@ -1680,17 +1595,12 @@
         <p:txBody>
           <a:bodyPr xmlns:a="http://schemas.openxmlformats.org/drawingml/2006/main"/>
           <a:lstStyle xmlns:a="http://schemas.openxmlformats.org/drawingml/2006/main"/>
-          <a:p xmlns:a="http://schemas.openxmlformats.org/drawingml/2006/main">
-            <a:r>
-              <a:rPr lang="en-US"/>
-              <a:t/>
-            </a:r>
-          </a:p>
-        </p:txBody>
-      </p:sp>
-      <p:sp>
-        <p:nvSpPr>
-          <p:cNvPr id="10049" name="TextBox 2"/>
+          <a:p xmlns:a="http://schemas.openxmlformats.org/drawingml/2006/main"/>
+        </p:txBody>
+      </p:sp>
+      <p:sp>
+        <p:nvSpPr>
+          <p:cNvPr id="100049" name="TextBox 2"/>
           <p:cNvSpPr txBox="1"/>
           <p:nvPr/>
         </p:nvSpPr>
@@ -1739,7 +1649,7 @@
       <p:grpSpPr/>
       <p:sp>
         <p:nvSpPr>
-          <p:cNvPr id="10004" name="TextBox 1"/>
+          <p:cNvPr id="100004" name="TextBox 1"/>
           <p:cNvSpPr/>
           <p:nvPr/>
         </p:nvSpPr>
@@ -1758,17 +1668,12 @@
         <p:txBody>
           <a:bodyPr xmlns:a="http://schemas.openxmlformats.org/drawingml/2006/main"/>
           <a:lstStyle xmlns:a="http://schemas.openxmlformats.org/drawingml/2006/main"/>
-          <a:p xmlns:a="http://schemas.openxmlformats.org/drawingml/2006/main">
-            <a:r>
-              <a:rPr lang="en-US"/>
-              <a:t/>
-            </a:r>
-          </a:p>
-        </p:txBody>
-      </p:sp>
-      <p:sp>
-        <p:nvSpPr>
-          <p:cNvPr id="10005" name="TextBox 2"/>
+          <a:p xmlns:a="http://schemas.openxmlformats.org/drawingml/2006/main"/>
+        </p:txBody>
+      </p:sp>
+      <p:sp>
+        <p:nvSpPr>
+          <p:cNvPr id="100005" name="TextBox 2"/>
           <p:cNvSpPr txBox="1"/>
           <p:nvPr/>
         </p:nvSpPr>
@@ -1817,7 +1722,7 @@
       <p:grpSpPr/>
       <p:sp>
         <p:nvSpPr>
-          <p:cNvPr id="10006" name="TextBox 1"/>
+          <p:cNvPr id="100006" name="TextBox 1"/>
           <p:cNvSpPr/>
           <p:nvPr/>
         </p:nvSpPr>
@@ -1836,17 +1741,12 @@
         <p:txBody>
           <a:bodyPr xmlns:a="http://schemas.openxmlformats.org/drawingml/2006/main"/>
           <a:lstStyle xmlns:a="http://schemas.openxmlformats.org/drawingml/2006/main"/>
-          <a:p xmlns:a="http://schemas.openxmlformats.org/drawingml/2006/main">
-            <a:r>
-              <a:rPr lang="en-US"/>
-              <a:t/>
-            </a:r>
-          </a:p>
-        </p:txBody>
-      </p:sp>
-      <p:sp>
-        <p:nvSpPr>
-          <p:cNvPr id="10007" name="TextBox 2"/>
+          <a:p xmlns:a="http://schemas.openxmlformats.org/drawingml/2006/main"/>
+        </p:txBody>
+      </p:sp>
+      <p:sp>
+        <p:nvSpPr>
+          <p:cNvPr id="100007" name="TextBox 2"/>
           <p:cNvSpPr txBox="1"/>
           <p:nvPr/>
         </p:nvSpPr>
@@ -1895,7 +1795,7 @@
       <p:grpSpPr/>
       <p:sp>
         <p:nvSpPr>
-          <p:cNvPr id="10008" name="TextBox 1"/>
+          <p:cNvPr id="100008" name="TextBox 1"/>
           <p:cNvSpPr/>
           <p:nvPr/>
         </p:nvSpPr>
@@ -1914,17 +1814,12 @@
         <p:txBody>
           <a:bodyPr xmlns:a="http://schemas.openxmlformats.org/drawingml/2006/main"/>
           <a:lstStyle xmlns:a="http://schemas.openxmlformats.org/drawingml/2006/main"/>
-          <a:p xmlns:a="http://schemas.openxmlformats.org/drawingml/2006/main">
-            <a:r>
-              <a:rPr lang="en-US"/>
-              <a:t/>
-            </a:r>
-          </a:p>
-        </p:txBody>
-      </p:sp>
-      <p:sp>
-        <p:nvSpPr>
-          <p:cNvPr id="10009" name="TextBox 2"/>
+          <a:p xmlns:a="http://schemas.openxmlformats.org/drawingml/2006/main"/>
+        </p:txBody>
+      </p:sp>
+      <p:sp>
+        <p:nvSpPr>
+          <p:cNvPr id="100009" name="TextBox 2"/>
           <p:cNvSpPr txBox="1"/>
           <p:nvPr/>
         </p:nvSpPr>
@@ -1973,7 +1868,7 @@
       <p:grpSpPr/>
       <p:sp>
         <p:nvSpPr>
-          <p:cNvPr id="10010" name="TextBox 1"/>
+          <p:cNvPr id="100010" name="TextBox 1"/>
           <p:cNvSpPr/>
           <p:nvPr/>
         </p:nvSpPr>
@@ -1992,17 +1887,12 @@
         <p:txBody>
           <a:bodyPr xmlns:a="http://schemas.openxmlformats.org/drawingml/2006/main"/>
           <a:lstStyle xmlns:a="http://schemas.openxmlformats.org/drawingml/2006/main"/>
-          <a:p xmlns:a="http://schemas.openxmlformats.org/drawingml/2006/main">
-            <a:r>
-              <a:rPr lang="en-US"/>
-              <a:t/>
-            </a:r>
-          </a:p>
-        </p:txBody>
-      </p:sp>
-      <p:sp>
-        <p:nvSpPr>
-          <p:cNvPr id="10011" name="TextBox 2"/>
+          <a:p xmlns:a="http://schemas.openxmlformats.org/drawingml/2006/main"/>
+        </p:txBody>
+      </p:sp>
+      <p:sp>
+        <p:nvSpPr>
+          <p:cNvPr id="100011" name="TextBox 2"/>
           <p:cNvSpPr txBox="1"/>
           <p:nvPr/>
         </p:nvSpPr>
@@ -2051,7 +1941,7 @@
       <p:grpSpPr/>
       <p:sp>
         <p:nvSpPr>
-          <p:cNvPr id="10012" name="TextBox 1"/>
+          <p:cNvPr id="100012" name="TextBox 1"/>
           <p:cNvSpPr/>
           <p:nvPr/>
         </p:nvSpPr>
@@ -2070,17 +1960,12 @@
         <p:txBody>
           <a:bodyPr xmlns:a="http://schemas.openxmlformats.org/drawingml/2006/main"/>
           <a:lstStyle xmlns:a="http://schemas.openxmlformats.org/drawingml/2006/main"/>
-          <a:p xmlns:a="http://schemas.openxmlformats.org/drawingml/2006/main">
-            <a:r>
-              <a:rPr lang="en-US"/>
-              <a:t/>
-            </a:r>
-          </a:p>
-        </p:txBody>
-      </p:sp>
-      <p:sp>
-        <p:nvSpPr>
-          <p:cNvPr id="10013" name="TextBox 2"/>
+          <a:p xmlns:a="http://schemas.openxmlformats.org/drawingml/2006/main"/>
+        </p:txBody>
+      </p:sp>
+      <p:sp>
+        <p:nvSpPr>
+          <p:cNvPr id="100013" name="TextBox 2"/>
           <p:cNvSpPr txBox="1"/>
           <p:nvPr/>
         </p:nvSpPr>
@@ -2129,7 +2014,7 @@
       <p:grpSpPr/>
       <p:sp>
         <p:nvSpPr>
-          <p:cNvPr id="10014" name="TextBox 1"/>
+          <p:cNvPr id="100014" name="TextBox 1"/>
           <p:cNvSpPr/>
           <p:nvPr/>
         </p:nvSpPr>
@@ -2148,17 +2033,12 @@
         <p:txBody>
           <a:bodyPr xmlns:a="http://schemas.openxmlformats.org/drawingml/2006/main"/>
           <a:lstStyle xmlns:a="http://schemas.openxmlformats.org/drawingml/2006/main"/>
-          <a:p xmlns:a="http://schemas.openxmlformats.org/drawingml/2006/main">
-            <a:r>
-              <a:rPr lang="en-US"/>
-              <a:t/>
-            </a:r>
-          </a:p>
-        </p:txBody>
-      </p:sp>
-      <p:sp>
-        <p:nvSpPr>
-          <p:cNvPr id="10015" name="TextBox 2"/>
+          <a:p xmlns:a="http://schemas.openxmlformats.org/drawingml/2006/main"/>
+        </p:txBody>
+      </p:sp>
+      <p:sp>
+        <p:nvSpPr>
+          <p:cNvPr id="100015" name="TextBox 2"/>
           <p:cNvSpPr txBox="1"/>
           <p:nvPr/>
         </p:nvSpPr>
@@ -2207,7 +2087,7 @@
       <p:grpSpPr/>
       <p:sp>
         <p:nvSpPr>
-          <p:cNvPr id="10016" name="TextBox 1"/>
+          <p:cNvPr id="100016" name="TextBox 1"/>
           <p:cNvSpPr/>
           <p:nvPr/>
         </p:nvSpPr>
@@ -2226,17 +2106,12 @@
         <p:txBody>
           <a:bodyPr xmlns:a="http://schemas.openxmlformats.org/drawingml/2006/main"/>
           <a:lstStyle xmlns:a="http://schemas.openxmlformats.org/drawingml/2006/main"/>
-          <a:p xmlns:a="http://schemas.openxmlformats.org/drawingml/2006/main">
-            <a:r>
-              <a:rPr lang="en-US"/>
-              <a:t/>
-            </a:r>
-          </a:p>
-        </p:txBody>
-      </p:sp>
-      <p:sp>
-        <p:nvSpPr>
-          <p:cNvPr id="10017" name="TextBox 2"/>
+          <a:p xmlns:a="http://schemas.openxmlformats.org/drawingml/2006/main"/>
+        </p:txBody>
+      </p:sp>
+      <p:sp>
+        <p:nvSpPr>
+          <p:cNvPr id="100017" name="TextBox 2"/>
           <p:cNvSpPr txBox="1"/>
           <p:nvPr/>
         </p:nvSpPr>
